--- a/dist/weeks/서비스디자인_01주차_오리엔테이션.pptx
+++ b/dist/weeks/서비스디자인_01주차_오리엔테이션.pptx
@@ -9482,7 +9482,7 @@
         <p:spPr>
           <a:xfrm>
             <a:off x="640080" y="1719072"/>
-            <a:ext cx="1600200" cy="566928"/>
+            <a:ext cx="1600200" cy="593054"/>
           </a:xfrm>
           <a:prstGeom prst="rect">
             <a:avLst/>
@@ -9521,7 +9521,7 @@
         <p:spPr>
           <a:xfrm>
             <a:off x="2377440" y="1719072"/>
-            <a:ext cx="6888175" cy="566928"/>
+            <a:ext cx="6888175" cy="593054"/>
           </a:xfrm>
           <a:prstGeom prst="rect">
             <a:avLst/>
@@ -9560,7 +9560,7 @@
         <p:spPr>
           <a:xfrm>
             <a:off x="9265615" y="1719072"/>
-            <a:ext cx="2286000" cy="566928"/>
+            <a:ext cx="2286000" cy="593054"/>
           </a:xfrm>
           <a:prstGeom prst="rect">
             <a:avLst/>
@@ -9598,7 +9598,7 @@
         </p:nvSpPr>
         <p:spPr>
           <a:xfrm>
-            <a:off x="640080" y="2267712"/>
+            <a:off x="640080" y="2293838"/>
             <a:ext cx="10911535" cy="9144"/>
           </a:xfrm>
           <a:prstGeom prst="rect">
@@ -9623,8 +9623,8 @@
         </p:nvSpPr>
         <p:spPr>
           <a:xfrm>
-            <a:off x="640080" y="2286000"/>
-            <a:ext cx="1600200" cy="566928"/>
+            <a:off x="640080" y="2312126"/>
+            <a:ext cx="1600200" cy="593054"/>
           </a:xfrm>
           <a:prstGeom prst="rect">
             <a:avLst/>
@@ -9662,8 +9662,8 @@
         </p:nvSpPr>
         <p:spPr>
           <a:xfrm>
-            <a:off x="2377440" y="2286000"/>
-            <a:ext cx="6888175" cy="566928"/>
+            <a:off x="2377440" y="2312126"/>
+            <a:ext cx="6888175" cy="593054"/>
           </a:xfrm>
           <a:prstGeom prst="rect">
             <a:avLst/>
@@ -9701,8 +9701,8 @@
         </p:nvSpPr>
         <p:spPr>
           <a:xfrm>
-            <a:off x="9265615" y="2286000"/>
-            <a:ext cx="2286000" cy="566928"/>
+            <a:off x="9265615" y="2312126"/>
+            <a:ext cx="2286000" cy="593054"/>
           </a:xfrm>
           <a:prstGeom prst="rect">
             <a:avLst/>
@@ -9740,7 +9740,7 @@
         </p:nvSpPr>
         <p:spPr>
           <a:xfrm>
-            <a:off x="640080" y="2834640"/>
+            <a:off x="640080" y="2886891"/>
             <a:ext cx="10911535" cy="9144"/>
           </a:xfrm>
           <a:prstGeom prst="rect">
@@ -9765,8 +9765,8 @@
         </p:nvSpPr>
         <p:spPr>
           <a:xfrm>
-            <a:off x="640080" y="2852928"/>
-            <a:ext cx="1600200" cy="566928"/>
+            <a:off x="640080" y="2905179"/>
+            <a:ext cx="1600200" cy="593054"/>
           </a:xfrm>
           <a:prstGeom prst="rect">
             <a:avLst/>
@@ -9804,8 +9804,8 @@
         </p:nvSpPr>
         <p:spPr>
           <a:xfrm>
-            <a:off x="2377440" y="2852928"/>
-            <a:ext cx="6888175" cy="566928"/>
+            <a:off x="2377440" y="2905179"/>
+            <a:ext cx="6888175" cy="593054"/>
           </a:xfrm>
           <a:prstGeom prst="rect">
             <a:avLst/>
@@ -9843,7 +9843,7 @@
         </p:nvSpPr>
         <p:spPr>
           <a:xfrm>
-            <a:off x="640080" y="3401568"/>
+            <a:off x="640080" y="3479945"/>
             <a:ext cx="10911535" cy="9144"/>
           </a:xfrm>
           <a:prstGeom prst="rect">
@@ -9868,8 +9868,8 @@
         </p:nvSpPr>
         <p:spPr>
           <a:xfrm>
-            <a:off x="640080" y="3419856"/>
-            <a:ext cx="1600200" cy="566928"/>
+            <a:off x="640080" y="3498233"/>
+            <a:ext cx="1600200" cy="593054"/>
           </a:xfrm>
           <a:prstGeom prst="rect">
             <a:avLst/>
@@ -9907,8 +9907,8 @@
         </p:nvSpPr>
         <p:spPr>
           <a:xfrm>
-            <a:off x="2377440" y="3419856"/>
-            <a:ext cx="6888175" cy="566928"/>
+            <a:off x="2377440" y="3498233"/>
+            <a:ext cx="6888175" cy="593054"/>
           </a:xfrm>
           <a:prstGeom prst="rect">
             <a:avLst/>
@@ -9946,8 +9946,8 @@
         </p:nvSpPr>
         <p:spPr>
           <a:xfrm>
-            <a:off x="9265615" y="3419856"/>
-            <a:ext cx="2286000" cy="566928"/>
+            <a:off x="9265615" y="3498233"/>
+            <a:ext cx="2286000" cy="593054"/>
           </a:xfrm>
           <a:prstGeom prst="rect">
             <a:avLst/>
@@ -9985,7 +9985,7 @@
         </p:nvSpPr>
         <p:spPr>
           <a:xfrm>
-            <a:off x="640080" y="3968496"/>
+            <a:off x="640080" y="4072999"/>
             <a:ext cx="10911535" cy="9144"/>
           </a:xfrm>
           <a:prstGeom prst="rect">
@@ -10010,8 +10010,8 @@
         </p:nvSpPr>
         <p:spPr>
           <a:xfrm>
-            <a:off x="640080" y="3986784"/>
-            <a:ext cx="1600200" cy="566928"/>
+            <a:off x="640080" y="4091287"/>
+            <a:ext cx="1600200" cy="593054"/>
           </a:xfrm>
           <a:prstGeom prst="rect">
             <a:avLst/>
@@ -10049,8 +10049,8 @@
         </p:nvSpPr>
         <p:spPr>
           <a:xfrm>
-            <a:off x="2377440" y="3986784"/>
-            <a:ext cx="6888175" cy="566928"/>
+            <a:off x="2377440" y="4091287"/>
+            <a:ext cx="6888175" cy="593054"/>
           </a:xfrm>
           <a:prstGeom prst="rect">
             <a:avLst/>
@@ -10088,7 +10088,7 @@
         </p:nvSpPr>
         <p:spPr>
           <a:xfrm>
-            <a:off x="640080" y="4535424"/>
+            <a:off x="640080" y="4666053"/>
             <a:ext cx="10911535" cy="9144"/>
           </a:xfrm>
           <a:prstGeom prst="rect">
@@ -10113,8 +10113,8 @@
         </p:nvSpPr>
         <p:spPr>
           <a:xfrm>
-            <a:off x="640080" y="4553712"/>
-            <a:ext cx="1600200" cy="566928"/>
+            <a:off x="640080" y="4684341"/>
+            <a:ext cx="1600200" cy="593054"/>
           </a:xfrm>
           <a:prstGeom prst="rect">
             <a:avLst/>
@@ -10152,8 +10152,8 @@
         </p:nvSpPr>
         <p:spPr>
           <a:xfrm>
-            <a:off x="2377440" y="4553712"/>
-            <a:ext cx="6888175" cy="566928"/>
+            <a:off x="2377440" y="4684341"/>
+            <a:ext cx="6888175" cy="593054"/>
           </a:xfrm>
           <a:prstGeom prst="rect">
             <a:avLst/>
@@ -10191,8 +10191,8 @@
         </p:nvSpPr>
         <p:spPr>
           <a:xfrm>
-            <a:off x="9265615" y="4553712"/>
-            <a:ext cx="2286000" cy="566928"/>
+            <a:off x="9265615" y="4684341"/>
+            <a:ext cx="2286000" cy="593054"/>
           </a:xfrm>
           <a:prstGeom prst="rect">
             <a:avLst/>
@@ -10230,7 +10230,7 @@
         </p:nvSpPr>
         <p:spPr>
           <a:xfrm>
-            <a:off x="640080" y="5102352"/>
+            <a:off x="640080" y="5259106"/>
             <a:ext cx="10911535" cy="9144"/>
           </a:xfrm>
           <a:prstGeom prst="rect">
@@ -10255,8 +10255,8 @@
         </p:nvSpPr>
         <p:spPr>
           <a:xfrm>
-            <a:off x="640080" y="5120640"/>
-            <a:ext cx="1600200" cy="566928"/>
+            <a:off x="640080" y="5277394"/>
+            <a:ext cx="1600200" cy="593054"/>
           </a:xfrm>
           <a:prstGeom prst="rect">
             <a:avLst/>
@@ -10294,8 +10294,8 @@
         </p:nvSpPr>
         <p:spPr>
           <a:xfrm>
-            <a:off x="2377440" y="5120640"/>
-            <a:ext cx="6888175" cy="566928"/>
+            <a:off x="2377440" y="5277394"/>
+            <a:ext cx="6888175" cy="593054"/>
           </a:xfrm>
           <a:prstGeom prst="rect">
             <a:avLst/>
@@ -10333,8 +10333,8 @@
         </p:nvSpPr>
         <p:spPr>
           <a:xfrm>
-            <a:off x="9265615" y="5120640"/>
-            <a:ext cx="2286000" cy="566928"/>
+            <a:off x="9265615" y="5277394"/>
+            <a:ext cx="2286000" cy="593054"/>
           </a:xfrm>
           <a:prstGeom prst="rect">
             <a:avLst/>
